--- a/presentations/ADEVI_2026_Docufy_Legal.pptx
+++ b/presentations/ADEVI_2026_Docufy_Legal.pptx
@@ -3931,7 +3931,7 @@
                   <a:srgbClr val="C9A85C"/>
                 </a:solidFill>
               </a:rPr>
-              <a:t>EL RESULTADO</a:t>
+              <a:t>PARA QUE ESTA DISENADO</a:t>
             </a:r>
           </a:p>
         </p:txBody>
@@ -4719,7 +4719,7 @@
         </p:nvSpPr>
         <p:spPr>
           <a:xfrm>
-            <a:off x="502920" y="365760"/>
+            <a:off x="502920" y="274320"/>
             <a:ext cx="10972800" cy="731520"/>
           </a:xfrm>
           <a:prstGeom prst="rect">
@@ -4740,7 +4740,7 @@
                   <a:srgbClr val="C9A85C"/>
                 </a:solidFill>
               </a:rPr>
-              <a:t>OFERTA EXCLUSIVA PARA ASOCIADOS ADEVI</a:t>
+              <a:t>BUSCAMOS 10 DESPACHOS FUNDADORES EN ADEVI</a:t>
             </a:r>
           </a:p>
         </p:txBody>
@@ -4753,8 +4753,8 @@
         </p:nvSpPr>
         <p:spPr>
           <a:xfrm>
-            <a:off x="502920" y="1188720"/>
-            <a:ext cx="10972800" cy="914400"/>
+            <a:off x="502920" y="1097280"/>
+            <a:ext cx="10972800" cy="685800"/>
           </a:xfrm>
           <a:prstGeom prst="rect">
             <a:avLst/>
@@ -4769,12 +4769,12 @@
           <a:p>
             <a:pPr algn="ctr"/>
             <a:r>
-              <a:rPr sz="2200" b="0" i="1">
+              <a:rPr sz="2000" b="0" i="1">
                 <a:solidFill>
                   <a:srgbClr val="E8ECF5"/>
                 </a:solidFill>
               </a:rPr>
-              <a:t>Solo para los presentes hoy. No está en nuestra web.</a:t>
+              <a:t>Los que entren ahora construyen el producto con nosotros.</a:t>
             </a:r>
           </a:p>
         </p:txBody>
@@ -4787,8 +4787,8 @@
         </p:nvSpPr>
         <p:spPr>
           <a:xfrm>
-            <a:off x="1828800" y="2286000"/>
-            <a:ext cx="8503920" cy="2926080"/>
+            <a:off x="411480" y="1965960"/>
+            <a:ext cx="3566160" cy="3474720"/>
           </a:xfrm>
           <a:prstGeom prst="rect">
             <a:avLst/>
@@ -4830,8 +4830,8 @@
         </p:nvSpPr>
         <p:spPr>
           <a:xfrm>
-            <a:off x="1828800" y="2286000"/>
-            <a:ext cx="8503920" cy="91440"/>
+            <a:off x="411480" y="1965960"/>
+            <a:ext cx="3566160" cy="91440"/>
           </a:xfrm>
           <a:prstGeom prst="rect">
             <a:avLst/>
@@ -4873,8 +4873,8 @@
         </p:nvSpPr>
         <p:spPr>
           <a:xfrm>
-            <a:off x="2011680" y="2423160"/>
-            <a:ext cx="8138160" cy="822960"/>
+            <a:off x="594360" y="2103120"/>
+            <a:ext cx="3200400" cy="1005840"/>
           </a:xfrm>
           <a:prstGeom prst="rect">
             <a:avLst/>
@@ -4889,12 +4889,13 @@
           <a:p>
             <a:pPr algn="ctr"/>
             <a:r>
-              <a:rPr sz="2200" b="1" i="0">
+              <a:rPr sz="1900" b="1" i="0">
                 <a:solidFill>
                   <a:srgbClr val="FFFFFF"/>
                 </a:solidFill>
               </a:rPr>
-              <a:t>Sesión de diagnóstico gratuita (30 min)</a:t>
+              <a:t>Precio
+de socio fundador</a:t>
             </a:r>
           </a:p>
         </p:txBody>
@@ -4907,8 +4908,8 @@
         </p:nvSpPr>
         <p:spPr>
           <a:xfrm>
-            <a:off x="2011680" y="3246120"/>
-            <a:ext cx="8138160" cy="640080"/>
+            <a:off x="548640" y="3246120"/>
+            <a:ext cx="3291840" cy="1645920"/>
           </a:xfrm>
           <a:prstGeom prst="rect">
             <a:avLst/>
@@ -4923,26 +4924,114 @@
           <a:p>
             <a:pPr algn="ctr"/>
             <a:r>
-              <a:rPr sz="1800" b="0" i="0">
+              <a:rPr sz="1600" b="0" i="0">
                 <a:solidFill>
                   <a:srgbClr val="E8ECF5"/>
                 </a:solidFill>
               </a:rPr>
-              <a:t>Analizamos vuestro despacho y os decimos exactamente</a:t>
-            </a:r>
-          </a:p>
-        </p:txBody>
-      </p:sp>
-      <p:sp>
-        <p:nvSpPr>
-          <p:cNvPr id="10" name="TextBox 9"/>
+              <a:t>Condiciones que
+desaparecen cuando
+cerremos las 10 plazas.</a:t>
+            </a:r>
+          </a:p>
+        </p:txBody>
+      </p:sp>
+      <p:sp>
+        <p:nvSpPr>
+          <p:cNvPr id="10" name="Rectangle 9"/>
+          <p:cNvSpPr/>
+          <p:nvPr/>
+        </p:nvSpPr>
+        <p:spPr>
+          <a:xfrm>
+            <a:off x="4297680" y="1965960"/>
+            <a:ext cx="3566160" cy="3474720"/>
+          </a:xfrm>
+          <a:prstGeom prst="rect">
+            <a:avLst/>
+          </a:prstGeom>
+          <a:solidFill>
+            <a:srgbClr val="12183C"/>
+          </a:solidFill>
+          <a:ln>
+            <a:noFill/>
+          </a:ln>
+        </p:spPr>
+        <p:style>
+          <a:lnRef idx="1">
+            <a:schemeClr val="accent1"/>
+          </a:lnRef>
+          <a:fillRef idx="3">
+            <a:schemeClr val="accent1"/>
+          </a:fillRef>
+          <a:effectRef idx="2">
+            <a:schemeClr val="accent1"/>
+          </a:effectRef>
+          <a:fontRef idx="minor">
+            <a:schemeClr val="lt1"/>
+          </a:fontRef>
+        </p:style>
+        <p:txBody>
+          <a:bodyPr rtlCol="0" anchor="ctr"/>
+          <a:lstStyle/>
+          <a:p>
+            <a:pPr algn="ctr"/>
+          </a:p>
+        </p:txBody>
+      </p:sp>
+      <p:sp>
+        <p:nvSpPr>
+          <p:cNvPr id="11" name="Rectangle 10"/>
+          <p:cNvSpPr/>
+          <p:nvPr/>
+        </p:nvSpPr>
+        <p:spPr>
+          <a:xfrm>
+            <a:off x="4297680" y="1965960"/>
+            <a:ext cx="3566160" cy="91440"/>
+          </a:xfrm>
+          <a:prstGeom prst="rect">
+            <a:avLst/>
+          </a:prstGeom>
+          <a:solidFill>
+            <a:srgbClr val="C9A85C"/>
+          </a:solidFill>
+          <a:ln>
+            <a:noFill/>
+          </a:ln>
+        </p:spPr>
+        <p:style>
+          <a:lnRef idx="1">
+            <a:schemeClr val="accent1"/>
+          </a:lnRef>
+          <a:fillRef idx="3">
+            <a:schemeClr val="accent1"/>
+          </a:fillRef>
+          <a:effectRef idx="2">
+            <a:schemeClr val="accent1"/>
+          </a:effectRef>
+          <a:fontRef idx="minor">
+            <a:schemeClr val="lt1"/>
+          </a:fontRef>
+        </p:style>
+        <p:txBody>
+          <a:bodyPr rtlCol="0" anchor="ctr"/>
+          <a:lstStyle/>
+          <a:p>
+            <a:pPr algn="ctr"/>
+          </a:p>
+        </p:txBody>
+      </p:sp>
+      <p:sp>
+        <p:nvSpPr>
+          <p:cNvPr id="12" name="TextBox 11"/>
           <p:cNvSpPr txBox="1"/>
           <p:nvPr/>
         </p:nvSpPr>
         <p:spPr>
           <a:xfrm>
-            <a:off x="2011680" y="3794760"/>
-            <a:ext cx="8138160" cy="640080"/>
+            <a:off x="4480560" y="2103120"/>
+            <a:ext cx="3200400" cy="1005840"/>
           </a:xfrm>
           <a:prstGeom prst="rect">
             <a:avLst/>
@@ -4957,26 +5046,27 @@
           <a:p>
             <a:pPr algn="ctr"/>
             <a:r>
-              <a:rPr sz="1800" b="0" i="0">
-                <a:solidFill>
-                  <a:srgbClr val="E8ECF5"/>
+              <a:rPr sz="1900" b="1" i="0">
+                <a:solidFill>
+                  <a:srgbClr val="FFFFFF"/>
                 </a:solidFill>
               </a:rPr>
-              <a:t>cuántas horas podríais recuperar al mes.</a:t>
-            </a:r>
-          </a:p>
-        </p:txBody>
-      </p:sp>
-      <p:sp>
-        <p:nvSpPr>
-          <p:cNvPr id="11" name="TextBox 10"/>
+              <a:t>Acceso directo
+al equipo</a:t>
+            </a:r>
+          </a:p>
+        </p:txBody>
+      </p:sp>
+      <p:sp>
+        <p:nvSpPr>
+          <p:cNvPr id="13" name="TextBox 12"/>
           <p:cNvSpPr txBox="1"/>
           <p:nvPr/>
         </p:nvSpPr>
         <p:spPr>
           <a:xfrm>
-            <a:off x="2011680" y="4389120"/>
-            <a:ext cx="8138160" cy="594360"/>
+            <a:off x="4434840" y="3246120"/>
+            <a:ext cx="3291840" cy="1645920"/>
           </a:xfrm>
           <a:prstGeom prst="rect">
             <a:avLst/>
@@ -4991,26 +5081,114 @@
           <a:p>
             <a:pPr algn="ctr"/>
             <a:r>
-              <a:rPr sz="1800" b="1" i="0">
-                <a:solidFill>
-                  <a:srgbClr val="C9A85C"/>
+              <a:rPr sz="1600" b="0" i="0">
+                <a:solidFill>
+                  <a:srgbClr val="E8ECF5"/>
                 </a:solidFill>
               </a:rPr>
-              <a:t>Sin compromiso. Sin presión.</a:t>
-            </a:r>
-          </a:p>
-        </p:txBody>
-      </p:sp>
-      <p:sp>
-        <p:nvSpPr>
-          <p:cNvPr id="12" name="TextBox 11"/>
+              <a:t>Vuestro flujo de trabajo
+se convierte en parte
+del producto.</a:t>
+            </a:r>
+          </a:p>
+        </p:txBody>
+      </p:sp>
+      <p:sp>
+        <p:nvSpPr>
+          <p:cNvPr id="14" name="Rectangle 13"/>
+          <p:cNvSpPr/>
+          <p:nvPr/>
+        </p:nvSpPr>
+        <p:spPr>
+          <a:xfrm>
+            <a:off x="8183879" y="1965960"/>
+            <a:ext cx="3566160" cy="3474720"/>
+          </a:xfrm>
+          <a:prstGeom prst="rect">
+            <a:avLst/>
+          </a:prstGeom>
+          <a:solidFill>
+            <a:srgbClr val="12183C"/>
+          </a:solidFill>
+          <a:ln>
+            <a:noFill/>
+          </a:ln>
+        </p:spPr>
+        <p:style>
+          <a:lnRef idx="1">
+            <a:schemeClr val="accent1"/>
+          </a:lnRef>
+          <a:fillRef idx="3">
+            <a:schemeClr val="accent1"/>
+          </a:fillRef>
+          <a:effectRef idx="2">
+            <a:schemeClr val="accent1"/>
+          </a:effectRef>
+          <a:fontRef idx="minor">
+            <a:schemeClr val="lt1"/>
+          </a:fontRef>
+        </p:style>
+        <p:txBody>
+          <a:bodyPr rtlCol="0" anchor="ctr"/>
+          <a:lstStyle/>
+          <a:p>
+            <a:pPr algn="ctr"/>
+          </a:p>
+        </p:txBody>
+      </p:sp>
+      <p:sp>
+        <p:nvSpPr>
+          <p:cNvPr id="15" name="Rectangle 14"/>
+          <p:cNvSpPr/>
+          <p:nvPr/>
+        </p:nvSpPr>
+        <p:spPr>
+          <a:xfrm>
+            <a:off x="8183879" y="1965960"/>
+            <a:ext cx="3566160" cy="91440"/>
+          </a:xfrm>
+          <a:prstGeom prst="rect">
+            <a:avLst/>
+          </a:prstGeom>
+          <a:solidFill>
+            <a:srgbClr val="C9A85C"/>
+          </a:solidFill>
+          <a:ln>
+            <a:noFill/>
+          </a:ln>
+        </p:spPr>
+        <p:style>
+          <a:lnRef idx="1">
+            <a:schemeClr val="accent1"/>
+          </a:lnRef>
+          <a:fillRef idx="3">
+            <a:schemeClr val="accent1"/>
+          </a:fillRef>
+          <a:effectRef idx="2">
+            <a:schemeClr val="accent1"/>
+          </a:effectRef>
+          <a:fontRef idx="minor">
+            <a:schemeClr val="lt1"/>
+          </a:fontRef>
+        </p:style>
+        <p:txBody>
+          <a:bodyPr rtlCol="0" anchor="ctr"/>
+          <a:lstStyle/>
+          <a:p>
+            <a:pPr algn="ctr"/>
+          </a:p>
+        </p:txBody>
+      </p:sp>
+      <p:sp>
+        <p:nvSpPr>
+          <p:cNvPr id="16" name="TextBox 15"/>
           <p:cNvSpPr txBox="1"/>
           <p:nvPr/>
         </p:nvSpPr>
         <p:spPr>
           <a:xfrm>
-            <a:off x="502920" y="5394960"/>
-            <a:ext cx="10972800" cy="548640"/>
+            <a:off x="8366759" y="2103120"/>
+            <a:ext cx="3200400" cy="1005840"/>
           </a:xfrm>
           <a:prstGeom prst="rect">
             <a:avLst/>
@@ -5025,26 +5203,97 @@
           <a:p>
             <a:pPr algn="ctr"/>
             <a:r>
-              <a:rPr sz="1900" b="0" i="0">
+              <a:rPr sz="1900" b="1" i="0">
+                <a:solidFill>
+                  <a:srgbClr val="FFFFFF"/>
+                </a:solidFill>
+              </a:rPr>
+              <a:t>Implementacion
+completa incluida</a:t>
+            </a:r>
+          </a:p>
+        </p:txBody>
+      </p:sp>
+      <p:sp>
+        <p:nvSpPr>
+          <p:cNvPr id="17" name="TextBox 16"/>
+          <p:cNvSpPr txBox="1"/>
+          <p:nvPr/>
+        </p:nvSpPr>
+        <p:spPr>
+          <a:xfrm>
+            <a:off x="8321040" y="3246120"/>
+            <a:ext cx="3291840" cy="1645920"/>
+          </a:xfrm>
+          <a:prstGeom prst="rect">
+            <a:avLst/>
+          </a:prstGeom>
+          <a:noFill/>
+        </p:spPr>
+        <p:txBody>
+          <a:bodyPr wrap="square">
+            <a:spAutoFit/>
+          </a:bodyPr>
+          <a:lstStyle/>
+          <a:p>
+            <a:pPr algn="ctr"/>
+            <a:r>
+              <a:rPr sz="1600" b="0" i="0">
                 <a:solidFill>
                   <a:srgbClr val="E8ECF5"/>
                 </a:solidFill>
               </a:rPr>
-              <a:t>Escaneáis el QR  →  Reserváis vuestra sesión  →  Nosotros hacemos el resto.</a:t>
-            </a:r>
-          </a:p>
-        </p:txBody>
-      </p:sp>
-      <p:sp>
-        <p:nvSpPr>
-          <p:cNvPr id="13" name="Rectangle 12"/>
+              <a:t>Onboarding, formacion
+del equipo y soporte
+personalizado.</a:t>
+            </a:r>
+          </a:p>
+        </p:txBody>
+      </p:sp>
+      <p:sp>
+        <p:nvSpPr>
+          <p:cNvPr id="18" name="TextBox 17"/>
+          <p:cNvSpPr txBox="1"/>
+          <p:nvPr/>
+        </p:nvSpPr>
+        <p:spPr>
+          <a:xfrm>
+            <a:off x="502920" y="5623560"/>
+            <a:ext cx="10972800" cy="502920"/>
+          </a:xfrm>
+          <a:prstGeom prst="rect">
+            <a:avLst/>
+          </a:prstGeom>
+          <a:noFill/>
+        </p:spPr>
+        <p:txBody>
+          <a:bodyPr wrap="square">
+            <a:spAutoFit/>
+          </a:bodyPr>
+          <a:lstStyle/>
+          <a:p>
+            <a:pPr algn="ctr"/>
+            <a:r>
+              <a:rPr sz="1700" b="0" i="0">
+                <a:solidFill>
+                  <a:srgbClr val="E8ECF5"/>
+                </a:solidFill>
+              </a:rPr>
+              <a:t>Escaneáis el QR · Reserváis vuestra sesión de diagnostico · Nosotros hacemos el resto.</a:t>
+            </a:r>
+          </a:p>
+        </p:txBody>
+      </p:sp>
+      <p:sp>
+        <p:nvSpPr>
+          <p:cNvPr id="19" name="Rectangle 18"/>
           <p:cNvSpPr/>
           <p:nvPr/>
         </p:nvSpPr>
         <p:spPr>
           <a:xfrm>
-            <a:off x="5184648" y="5989320"/>
-            <a:ext cx="1828800" cy="640080"/>
+            <a:off x="5184648" y="6172200"/>
+            <a:ext cx="1828800" cy="502920"/>
           </a:xfrm>
           <a:prstGeom prst="rect">
             <a:avLst/>
@@ -5080,14 +5329,14 @@
       </p:sp>
       <p:sp>
         <p:nvSpPr>
-          <p:cNvPr id="14" name="TextBox 13"/>
+          <p:cNvPr id="20" name="TextBox 19"/>
           <p:cNvSpPr txBox="1"/>
           <p:nvPr/>
         </p:nvSpPr>
         <p:spPr>
           <a:xfrm>
-            <a:off x="5184648" y="5989320"/>
-            <a:ext cx="1828800" cy="640080"/>
+            <a:off x="5184648" y="6172200"/>
+            <a:ext cx="1828800" cy="502920"/>
           </a:xfrm>
           <a:prstGeom prst="rect">
             <a:avLst/>
@@ -5102,12 +5351,12 @@
           <a:p>
             <a:pPr algn="ctr"/>
             <a:r>
-              <a:rPr sz="1800" b="1" i="0">
+              <a:rPr sz="1600" b="1" i="0">
                 <a:solidFill>
                   <a:srgbClr val="C9A85C"/>
                 </a:solidFill>
               </a:rPr>
-              <a:t>[ QR aquí ]</a:t>
+              <a:t>[ QR aqui ]</a:t>
             </a:r>
           </a:p>
         </p:txBody>
@@ -5146,8 +5395,8 @@
         </p:nvSpPr>
         <p:spPr>
           <a:xfrm>
-            <a:off x="731520" y="1371600"/>
-            <a:ext cx="10698480" cy="1188720"/>
+            <a:off x="731520" y="640080"/>
+            <a:ext cx="10698480" cy="914400"/>
           </a:xfrm>
           <a:prstGeom prst="rect">
             <a:avLst/>
@@ -5162,7 +5411,7 @@
           <a:p>
             <a:pPr algn="ctr"/>
             <a:r>
-              <a:rPr sz="2800" b="0" i="0">
+              <a:rPr sz="2600" b="0" i="0">
                 <a:solidFill>
                   <a:srgbClr val="E8ECF5"/>
                 </a:solidFill>
@@ -5180,7 +5429,7 @@
         </p:nvSpPr>
         <p:spPr>
           <a:xfrm>
-            <a:off x="3200400" y="2834640"/>
+            <a:off x="3200400" y="1737360"/>
             <a:ext cx="5760720" cy="73152"/>
           </a:xfrm>
           <a:prstGeom prst="rect">
@@ -5223,7 +5472,7 @@
         </p:nvSpPr>
         <p:spPr>
           <a:xfrm>
-            <a:off x="731520" y="3017520"/>
+            <a:off x="731520" y="1920240"/>
             <a:ext cx="10698480" cy="1371600"/>
           </a:xfrm>
           <a:prstGeom prst="rect">
@@ -5239,61 +5488,27 @@
           <a:p>
             <a:pPr algn="ctr"/>
             <a:r>
-              <a:rPr sz="3600" b="1" i="0">
+              <a:rPr sz="3400" b="1" i="0">
                 <a:solidFill>
                   <a:srgbClr val="FFFFFF"/>
                 </a:solidFill>
               </a:rPr>
               <a:t>Esto no es el futuro.
-Es lo que ya están haciendo despachos como el vuestro.</a:t>
-            </a:r>
-          </a:p>
-        </p:txBody>
-      </p:sp>
-      <p:sp>
-        <p:nvSpPr>
-          <p:cNvPr id="5" name="TextBox 4"/>
-          <p:cNvSpPr txBox="1"/>
-          <p:nvPr/>
-        </p:nvSpPr>
-        <p:spPr>
-          <a:xfrm>
-            <a:off x="731520" y="4754880"/>
-            <a:ext cx="10698480" cy="822960"/>
-          </a:xfrm>
-          <a:prstGeom prst="rect">
-            <a:avLst/>
-          </a:prstGeom>
-          <a:noFill/>
-        </p:spPr>
-        <p:txBody>
-          <a:bodyPr wrap="square">
-            <a:spAutoFit/>
-          </a:bodyPr>
-          <a:lstStyle/>
-          <a:p>
-            <a:pPr algn="ctr"/>
-            <a:r>
-              <a:rPr sz="2600" b="1" i="0">
-                <a:solidFill>
-                  <a:srgbClr val="C9A85C"/>
-                </a:solidFill>
-              </a:rPr>
-              <a:t>La pregunta es cuándo queréis empezar vosotros.</a:t>
-            </a:r>
-          </a:p>
-        </p:txBody>
-      </p:sp>
-      <p:sp>
-        <p:nvSpPr>
-          <p:cNvPr id="6" name="Rectangle 5"/>
+Es lo que ya esta pasando en despachos como el vuestro.</a:t>
+            </a:r>
+          </a:p>
+        </p:txBody>
+      </p:sp>
+      <p:sp>
+        <p:nvSpPr>
+          <p:cNvPr id="5" name="Rectangle 4"/>
           <p:cNvSpPr/>
           <p:nvPr/>
         </p:nvSpPr>
         <p:spPr>
           <a:xfrm>
-            <a:off x="0" y="6126480"/>
-            <a:ext cx="12188952" cy="731520"/>
+            <a:off x="731520" y="3520440"/>
+            <a:ext cx="10698480" cy="1371600"/>
           </a:xfrm>
           <a:prstGeom prst="rect">
             <a:avLst/>
@@ -5329,7 +5544,120 @@
       </p:sp>
       <p:sp>
         <p:nvSpPr>
+          <p:cNvPr id="6" name="TextBox 5"/>
+          <p:cNvSpPr txBox="1"/>
+          <p:nvPr/>
+        </p:nvSpPr>
+        <p:spPr>
+          <a:xfrm>
+            <a:off x="914400" y="3611880"/>
+            <a:ext cx="10332720" cy="1188720"/>
+          </a:xfrm>
+          <a:prstGeom prst="rect">
+            <a:avLst/>
+          </a:prstGeom>
+          <a:noFill/>
+        </p:spPr>
+        <p:txBody>
+          <a:bodyPr wrap="square">
+            <a:spAutoFit/>
+          </a:bodyPr>
+          <a:lstStyle/>
+          <a:p>
+            <a:pPr algn="ctr"/>
+            <a:r>
+              <a:rPr sz="1900" b="0" i="1">
+                <a:solidFill>
+                  <a:srgbClr val="E8ECF5"/>
+                </a:solidFill>
+              </a:rPr>
+              <a:t>Los primeros despachos que automatizaron la gestion de trafico
+no esperaron a que fuera perfecto.
+Entraron cuando todavia se estaba construyendo. Y eso les dio ventaja.</a:t>
+            </a:r>
+          </a:p>
+        </p:txBody>
+      </p:sp>
+      <p:sp>
+        <p:nvSpPr>
           <p:cNvPr id="7" name="TextBox 6"/>
+          <p:cNvSpPr txBox="1"/>
+          <p:nvPr/>
+        </p:nvSpPr>
+        <p:spPr>
+          <a:xfrm>
+            <a:off x="731520" y="5120640"/>
+            <a:ext cx="10698480" cy="731520"/>
+          </a:xfrm>
+          <a:prstGeom prst="rect">
+            <a:avLst/>
+          </a:prstGeom>
+          <a:noFill/>
+        </p:spPr>
+        <p:txBody>
+          <a:bodyPr wrap="square">
+            <a:spAutoFit/>
+          </a:bodyPr>
+          <a:lstStyle/>
+          <a:p>
+            <a:pPr algn="ctr"/>
+            <a:r>
+              <a:rPr sz="2600" b="1" i="0">
+                <a:solidFill>
+                  <a:srgbClr val="C9A85C"/>
+                </a:solidFill>
+              </a:rPr>
+              <a:t>La pregunta es cuando quereis empezar vosotros.</a:t>
+            </a:r>
+          </a:p>
+        </p:txBody>
+      </p:sp>
+      <p:sp>
+        <p:nvSpPr>
+          <p:cNvPr id="8" name="Rectangle 7"/>
+          <p:cNvSpPr/>
+          <p:nvPr/>
+        </p:nvSpPr>
+        <p:spPr>
+          <a:xfrm>
+            <a:off x="0" y="6126480"/>
+            <a:ext cx="12188952" cy="731520"/>
+          </a:xfrm>
+          <a:prstGeom prst="rect">
+            <a:avLst/>
+          </a:prstGeom>
+          <a:solidFill>
+            <a:srgbClr val="12183C"/>
+          </a:solidFill>
+          <a:ln>
+            <a:noFill/>
+          </a:ln>
+        </p:spPr>
+        <p:style>
+          <a:lnRef idx="1">
+            <a:schemeClr val="accent1"/>
+          </a:lnRef>
+          <a:fillRef idx="3">
+            <a:schemeClr val="accent1"/>
+          </a:fillRef>
+          <a:effectRef idx="2">
+            <a:schemeClr val="accent1"/>
+          </a:effectRef>
+          <a:fontRef idx="minor">
+            <a:schemeClr val="lt1"/>
+          </a:fontRef>
+        </p:style>
+        <p:txBody>
+          <a:bodyPr rtlCol="0" anchor="ctr"/>
+          <a:lstStyle/>
+          <a:p>
+            <a:pPr algn="ctr"/>
+          </a:p>
+        </p:txBody>
+      </p:sp>
+      <p:sp>
+        <p:nvSpPr>
+          <p:cNvPr id="9" name="TextBox 8"/>
           <p:cNvSpPr txBox="1"/>
           <p:nvPr/>
         </p:nvSpPr>
@@ -6750,7 +7078,7 @@
                   <a:srgbClr val="C9A85C"/>
                 </a:solidFill>
               </a:rPr>
-              <a:t>UN CASO REAL</a:t>
+              <a:t>LO QUE NOS DICEN LOS DESPACHOS</a:t>
             </a:r>
           </a:p>
         </p:txBody>
@@ -6806,8 +7134,8 @@
         </p:nvSpPr>
         <p:spPr>
           <a:xfrm>
-            <a:off x="502920" y="1051560"/>
-            <a:ext cx="10058400" cy="1005840"/>
+            <a:off x="502920" y="1097280"/>
+            <a:ext cx="10515600" cy="1188720"/>
           </a:xfrm>
           <a:prstGeom prst="rect">
             <a:avLst/>
@@ -6822,12 +7150,12 @@
           <a:p>
             <a:pPr algn="l"/>
             <a:r>
-              <a:rPr sz="2800" b="1" i="0">
+              <a:rPr sz="3000" b="1" i="0">
                 <a:solidFill>
                   <a:srgbClr val="FFFFFF"/>
                 </a:solidFill>
               </a:rPr>
-              <a:t>Javier. Despacho en Madrid. 12 años en tráfico.</a:t>
+              <a:t>Llevamos meses trabajando con los primeros despachos.</a:t>
             </a:r>
           </a:p>
         </p:txBody>
@@ -6840,8 +7168,8 @@
         </p:nvSpPr>
         <p:spPr>
           <a:xfrm>
-            <a:off x="502920" y="2148840"/>
-            <a:ext cx="10058400" cy="1371600"/>
+            <a:off x="502920" y="2423160"/>
+            <a:ext cx="10058400" cy="822960"/>
           </a:xfrm>
           <a:prstGeom prst="rect">
             <a:avLst/>
@@ -6856,14 +7184,12 @@
           <a:p>
             <a:pPr algn="l"/>
             <a:r>
-              <a:rPr sz="2000" b="0" i="1">
+              <a:rPr sz="2200" b="0" i="0">
                 <a:solidFill>
                   <a:srgbClr val="E8ECF5"/>
                 </a:solidFill>
               </a:rPr>
-              <a:t>"Teníamos dos administrativas a jornada completa solo persiguiendo a clientes
-para conseguir los DNI, partes y fotos. Empezábamos el lunes
-con la bandeja limpia y el miércoles ya estábamos otra vez colapsados."</a:t>
+              <a:t>Lo que nos dicen es siempre lo mismo:</a:t>
             </a:r>
           </a:p>
         </p:txBody>
@@ -6876,8 +7202,8 @@
         </p:nvSpPr>
         <p:spPr>
           <a:xfrm>
-            <a:off x="502920" y="3931920"/>
-            <a:ext cx="3474720" cy="2286000"/>
+            <a:off x="502920" y="3383280"/>
+            <a:ext cx="11247120" cy="804672"/>
           </a:xfrm>
           <a:prstGeom prst="rect">
             <a:avLst/>
@@ -6919,8 +7245,8 @@
         </p:nvSpPr>
         <p:spPr>
           <a:xfrm>
-            <a:off x="640080" y="4069080"/>
-            <a:ext cx="3200400" cy="914400"/>
+            <a:off x="731520" y="3429000"/>
+            <a:ext cx="10789920" cy="713232"/>
           </a:xfrm>
           <a:prstGeom prst="rect">
             <a:avLst/>
@@ -6933,63 +7259,28 @@
           </a:bodyPr>
           <a:lstStyle/>
           <a:p>
-            <a:pPr algn="ctr"/>
-            <a:r>
-              <a:rPr sz="4600" b="1" i="0">
-                <a:solidFill>
-                  <a:srgbClr val="C9A85C"/>
+            <a:pPr algn="l"/>
+            <a:r>
+              <a:rPr sz="2000" b="0" i="1">
+                <a:solidFill>
+                  <a:srgbClr val="E8ECF5"/>
                 </a:solidFill>
               </a:rPr>
-              <a:t>x2</a:t>
-            </a:r>
-          </a:p>
-        </p:txBody>
-      </p:sp>
-      <p:sp>
-        <p:nvSpPr>
-          <p:cNvPr id="9" name="TextBox 8"/>
-          <p:cNvSpPr txBox="1"/>
-          <p:nvPr/>
-        </p:nvSpPr>
-        <p:spPr>
-          <a:xfrm>
-            <a:off x="640080" y="5029200"/>
-            <a:ext cx="3200400" cy="1005840"/>
-          </a:xfrm>
-          <a:prstGeom prst="rect">
-            <a:avLst/>
-          </a:prstGeom>
-          <a:noFill/>
-        </p:spPr>
-        <p:txBody>
-          <a:bodyPr wrap="square">
-            <a:spAutoFit/>
-          </a:bodyPr>
-          <a:lstStyle/>
-          <a:p>
-            <a:pPr algn="ctr"/>
-            <a:r>
-              <a:rPr sz="1700" b="0" i="0">
-                <a:solidFill>
-                  <a:srgbClr val="E8ECF5"/>
-                </a:solidFill>
-              </a:rPr>
-              <a:t>expedientes/mes
-con el mismo equipo</a:t>
-            </a:r>
-          </a:p>
-        </p:txBody>
-      </p:sp>
-      <p:sp>
-        <p:nvSpPr>
-          <p:cNvPr id="10" name="Rectangle 9"/>
+              <a:t>"El problema no es que no sepamos hacer el trabajo."</a:t>
+            </a:r>
+          </a:p>
+        </p:txBody>
+      </p:sp>
+      <p:sp>
+        <p:nvSpPr>
+          <p:cNvPr id="9" name="Rectangle 8"/>
           <p:cNvSpPr/>
           <p:nvPr/>
         </p:nvSpPr>
         <p:spPr>
           <a:xfrm>
-            <a:off x="4343400" y="3931920"/>
-            <a:ext cx="3474720" cy="2286000"/>
+            <a:off x="502920" y="4343400"/>
+            <a:ext cx="11247120" cy="804672"/>
           </a:xfrm>
           <a:prstGeom prst="rect">
             <a:avLst/>
@@ -7025,14 +7316,14 @@
       </p:sp>
       <p:sp>
         <p:nvSpPr>
-          <p:cNvPr id="11" name="TextBox 10"/>
+          <p:cNvPr id="10" name="TextBox 9"/>
           <p:cNvSpPr txBox="1"/>
           <p:nvPr/>
         </p:nvSpPr>
         <p:spPr>
           <a:xfrm>
-            <a:off x="4480560" y="4069080"/>
-            <a:ext cx="3200400" cy="914400"/>
+            <a:off x="731520" y="4389120"/>
+            <a:ext cx="10789920" cy="713232"/>
           </a:xfrm>
           <a:prstGeom prst="rect">
             <a:avLst/>
@@ -7045,63 +7336,28 @@
           </a:bodyPr>
           <a:lstStyle/>
           <a:p>
-            <a:pPr algn="ctr"/>
-            <a:r>
-              <a:rPr sz="4600" b="1" i="0">
-                <a:solidFill>
-                  <a:srgbClr val="C9A85C"/>
+            <a:pPr algn="l"/>
+            <a:r>
+              <a:rPr sz="2000" b="0" i="1">
+                <a:solidFill>
+                  <a:srgbClr val="E8ECF5"/>
                 </a:solidFill>
               </a:rPr>
-              <a:t>−80%</a:t>
-            </a:r>
-          </a:p>
-        </p:txBody>
-      </p:sp>
-      <p:sp>
-        <p:nvSpPr>
-          <p:cNvPr id="12" name="TextBox 11"/>
-          <p:cNvSpPr txBox="1"/>
-          <p:nvPr/>
-        </p:nvSpPr>
-        <p:spPr>
-          <a:xfrm>
-            <a:off x="4480560" y="5029200"/>
-            <a:ext cx="3200400" cy="1005840"/>
-          </a:xfrm>
-          <a:prstGeom prst="rect">
-            <a:avLst/>
-          </a:prstGeom>
-          <a:noFill/>
-        </p:spPr>
-        <p:txBody>
-          <a:bodyPr wrap="square">
-            <a:spAutoFit/>
-          </a:bodyPr>
-          <a:lstStyle/>
-          <a:p>
-            <a:pPr algn="ctr"/>
-            <a:r>
-              <a:rPr sz="1700" b="0" i="0">
-                <a:solidFill>
-                  <a:srgbClr val="E8ECF5"/>
-                </a:solidFill>
-              </a:rPr>
-              <a:t>tiempo de gestión
-administrativa</a:t>
-            </a:r>
-          </a:p>
-        </p:txBody>
-      </p:sp>
-      <p:sp>
-        <p:nvSpPr>
-          <p:cNvPr id="13" name="Rectangle 12"/>
+              <a:t>"Es que la mitad del tiempo no lo estamos ejerciendo."</a:t>
+            </a:r>
+          </a:p>
+        </p:txBody>
+      </p:sp>
+      <p:sp>
+        <p:nvSpPr>
+          <p:cNvPr id="11" name="Rectangle 10"/>
           <p:cNvSpPr/>
           <p:nvPr/>
         </p:nvSpPr>
         <p:spPr>
           <a:xfrm>
-            <a:off x="8183880" y="3931920"/>
-            <a:ext cx="3474720" cy="2286000"/>
+            <a:off x="502920" y="5303520"/>
+            <a:ext cx="11247120" cy="804672"/>
           </a:xfrm>
           <a:prstGeom prst="rect">
             <a:avLst/>
@@ -7137,14 +7393,14 @@
       </p:sp>
       <p:sp>
         <p:nvSpPr>
-          <p:cNvPr id="14" name="TextBox 13"/>
+          <p:cNvPr id="12" name="TextBox 11"/>
           <p:cNvSpPr txBox="1"/>
           <p:nvPr/>
         </p:nvSpPr>
         <p:spPr>
           <a:xfrm>
-            <a:off x="8321040" y="4069080"/>
-            <a:ext cx="3200400" cy="914400"/>
+            <a:off x="731520" y="5349240"/>
+            <a:ext cx="10789920" cy="713232"/>
           </a:xfrm>
           <a:prstGeom prst="rect">
             <a:avLst/>
@@ -7157,49 +7413,14 @@
           </a:bodyPr>
           <a:lstStyle/>
           <a:p>
-            <a:pPr algn="ctr"/>
-            <a:r>
-              <a:rPr sz="4600" b="1" i="0">
-                <a:solidFill>
-                  <a:srgbClr val="C9A85C"/>
+            <a:pPr algn="l"/>
+            <a:r>
+              <a:rPr sz="2000" b="0" i="1">
+                <a:solidFill>
+                  <a:srgbClr val="E8ECF5"/>
                 </a:solidFill>
               </a:rPr>
-              <a:t>+35%</a:t>
-            </a:r>
-          </a:p>
-        </p:txBody>
-      </p:sp>
-      <p:sp>
-        <p:nvSpPr>
-          <p:cNvPr id="15" name="TextBox 14"/>
-          <p:cNvSpPr txBox="1"/>
-          <p:nvPr/>
-        </p:nvSpPr>
-        <p:spPr>
-          <a:xfrm>
-            <a:off x="8321040" y="5029200"/>
-            <a:ext cx="3200400" cy="1005840"/>
-          </a:xfrm>
-          <a:prstGeom prst="rect">
-            <a:avLst/>
-          </a:prstGeom>
-          <a:noFill/>
-        </p:spPr>
-        <p:txBody>
-          <a:bodyPr wrap="square">
-            <a:spAutoFit/>
-          </a:bodyPr>
-          <a:lstStyle/>
-          <a:p>
-            <a:pPr algn="ctr"/>
-            <a:r>
-              <a:rPr sz="1700" b="0" i="0">
-                <a:solidFill>
-                  <a:srgbClr val="E8ECF5"/>
-                </a:solidFill>
-              </a:rPr>
-              <a:t>facturación media
-por caso</a:t>
+              <a:t>"Somos abogados gestionando documentos, no casos."</a:t>
             </a:r>
           </a:p>
         </p:txBody>
